--- a/assets/ppts/M2.1.3_TCP_Architecture_Handshake.pptx
+++ b/assets/ppts/M2.1.3_TCP_Architecture_Handshake.pptx
@@ -8,6 +8,7 @@
     <p:sldId id="256" r:id="rId7"/>
     <p:sldId id="257" r:id="rId8"/>
     <p:sldId id="258" r:id="rId9"/>
+    <p:sldId id="259" r:id="rId10"/>
   </p:sldIdLst>
   <p:sldSz cx="12191695" cy="6858000" type="screen4x3"/>
   <p:notesSz cx="6858000" cy="9144000"/>
@@ -3141,8 +3142,8 @@
         </p:nvSpPr>
         <p:spPr>
           <a:xfrm>
-            <a:off x="822960" y="1188720"/>
-            <a:ext cx="164592" cy="4480560"/>
+            <a:off x="0" y="0"/>
+            <a:ext cx="12191695" cy="137160"/>
           </a:xfrm>
           <a:prstGeom prst="rect">
             <a:avLst/>
@@ -3178,14 +3179,57 @@
       </p:sp>
       <p:sp>
         <p:nvSpPr>
-          <p:cNvPr id="4" name="TextBox 3"/>
+          <p:cNvPr id="4" name="Rectangle 3"/>
+          <p:cNvSpPr/>
+          <p:nvPr/>
+        </p:nvSpPr>
+        <p:spPr>
+          <a:xfrm>
+            <a:off x="822960" y="1097280"/>
+            <a:ext cx="164592" cy="4663440"/>
+          </a:xfrm>
+          <a:prstGeom prst="rect">
+            <a:avLst/>
+          </a:prstGeom>
+          <a:solidFill>
+            <a:srgbClr val="D97706"/>
+          </a:solidFill>
+          <a:ln>
+            <a:noFill/>
+          </a:ln>
+        </p:spPr>
+        <p:style>
+          <a:lnRef idx="1">
+            <a:schemeClr val="accent1"/>
+          </a:lnRef>
+          <a:fillRef idx="3">
+            <a:schemeClr val="accent1"/>
+          </a:fillRef>
+          <a:effectRef idx="2">
+            <a:schemeClr val="accent1"/>
+          </a:effectRef>
+          <a:fontRef idx="minor">
+            <a:schemeClr val="lt1"/>
+          </a:fontRef>
+        </p:style>
+        <p:txBody>
+          <a:bodyPr rtlCol="0" anchor="ctr"/>
+          <a:lstStyle/>
+          <a:p>
+            <a:pPr algn="ctr"/>
+          </a:p>
+        </p:txBody>
+      </p:sp>
+      <p:sp>
+        <p:nvSpPr>
+          <p:cNvPr id="5" name="TextBox 4"/>
           <p:cNvSpPr txBox="1"/>
           <p:nvPr/>
         </p:nvSpPr>
         <p:spPr>
           <a:xfrm>
-            <a:off x="1280160" y="1097280"/>
-            <a:ext cx="10058400" cy="4663440"/>
+            <a:off x="1234440" y="1005840"/>
+            <a:ext cx="10241280" cy="4846320"/>
           </a:xfrm>
           <a:prstGeom prst="rect">
             <a:avLst/>
@@ -3200,70 +3244,165 @@
           <a:p>
             <a:pPr>
               <a:spcAft>
+                <a:spcPts val="1000"/>
+              </a:spcAft>
+              <a:defRPr b="1" sz="1300">
+                <a:solidFill>
+                  <a:srgbClr val="D97706"/>
+                </a:solidFill>
+              </a:defRPr>
+            </a:pPr>
+            <a:r>
+              <a:t>PCCST501 Computer Networks | KTU 2024 Scheme • MODULE 2 • M2.1.3</a:t>
+            </a:r>
+          </a:p>
+          <a:p>
+            <a:pPr>
+              <a:spcAft>
                 <a:spcPts val="1200"/>
               </a:spcAft>
-              <a:defRPr b="1" sz="1300">
-                <a:solidFill>
-                  <a:srgbClr val="D97706"/>
+              <a:defRPr b="1" sz="3000">
+                <a:solidFill>
+                  <a:srgbClr val="F8FAFC"/>
                 </a:solidFill>
               </a:defRPr>
             </a:pPr>
             <a:r>
-              <a:t>PCCST501 Computer Networks | KTU 2024 Scheme • MODULE 2 • M2.1.3</a:t>
+              <a:t>Transmission Control Protocol (TCP) Architecture</a:t>
             </a:r>
           </a:p>
           <a:p>
             <a:pPr>
               <a:spcAft>
-                <a:spcPts val="1400"/>
+                <a:spcPts val="2400"/>
               </a:spcAft>
-              <a:defRPr b="1" sz="3200">
-                <a:solidFill>
-                  <a:srgbClr val="F8FAFC"/>
+              <a:defRPr sz="1600">
+                <a:solidFill>
+                  <a:srgbClr val="94A3B8"/>
                 </a:solidFill>
               </a:defRPr>
             </a:pPr>
             <a:r>
-              <a:t>Transmission Control Protocol (TCP) Architecture</a:t>
+              <a:t>TCP 20-Byte Header Format, 3-Way Handshake Connection Setup, 4-Way Connection Teardown (TIME_WAIT 2MSL), Sequence/ACK Mechanics</a:t>
             </a:r>
           </a:p>
           <a:p>
             <a:pPr>
               <a:spcAft>
-                <a:spcPts val="2800"/>
+                <a:spcPts val="300"/>
               </a:spcAft>
-              <a:defRPr sz="1700">
+              <a:defRPr b="1" sz="1350">
+                <a:solidFill>
+                  <a:srgbClr val="E2E8F0"/>
+                </a:solidFill>
+              </a:defRPr>
+            </a:pPr>
+            <a:r>
+              <a:t>Prepared by: Prof. Anju Markose | Assistant Professor, Dept. of CSE | VJCET</a:t>
+            </a:r>
+          </a:p>
+          <a:p>
+            <a:pPr>
+              <a:defRPr sz="1150">
                 <a:solidFill>
                   <a:srgbClr val="94A3B8"/>
                 </a:solidFill>
               </a:defRPr>
             </a:pPr>
             <a:r>
-              <a:t>Stream-Oriented Full-Duplex Model, TCP Segment Header, 3-Way Handshake Connection Setup &amp; 4-Way Teardown</a:t>
-            </a:r>
-          </a:p>
+              <a:t>Viswajyothi College of Engineering and Technology (VJCET), Vazhakulam • KTU S5 CSE</a:t>
+            </a:r>
+          </a:p>
+        </p:txBody>
+      </p:sp>
+      <p:sp>
+        <p:nvSpPr>
+          <p:cNvPr id="6" name="Rounded Rectangle 5"/>
+          <p:cNvSpPr/>
+          <p:nvPr/>
+        </p:nvSpPr>
+        <p:spPr>
+          <a:xfrm>
+            <a:off x="8412480" y="5120640"/>
+            <a:ext cx="3017520" cy="822960"/>
+          </a:xfrm>
+          <a:prstGeom prst="roundRect">
+            <a:avLst/>
+          </a:prstGeom>
+          <a:solidFill>
+            <a:srgbClr val="1E293B"/>
+          </a:solidFill>
+          <a:ln w="12700">
+            <a:solidFill>
+              <a:srgbClr val="0E7490"/>
+            </a:solidFill>
+          </a:ln>
+        </p:spPr>
+        <p:style>
+          <a:lnRef idx="1">
+            <a:schemeClr val="accent1"/>
+          </a:lnRef>
+          <a:fillRef idx="3">
+            <a:schemeClr val="accent1"/>
+          </a:fillRef>
+          <a:effectRef idx="2">
+            <a:schemeClr val="accent1"/>
+          </a:effectRef>
+          <a:fontRef idx="minor">
+            <a:schemeClr val="lt1"/>
+          </a:fontRef>
+        </p:style>
+        <p:txBody>
+          <a:bodyPr rtlCol="0" anchor="ctr"/>
+          <a:lstStyle/>
+          <a:p>
+            <a:pPr algn="ctr"/>
+          </a:p>
+        </p:txBody>
+      </p:sp>
+      <p:sp>
+        <p:nvSpPr>
+          <p:cNvPr id="7" name="TextBox 6"/>
+          <p:cNvSpPr txBox="1"/>
+          <p:nvPr/>
+        </p:nvSpPr>
+        <p:spPr>
+          <a:xfrm>
+            <a:off x="8503920" y="5166360"/>
+            <a:ext cx="2834640" cy="731520"/>
+          </a:xfrm>
+          <a:prstGeom prst="rect">
+            <a:avLst/>
+          </a:prstGeom>
+          <a:noFill/>
+        </p:spPr>
+        <p:txBody>
+          <a:bodyPr wrap="none">
+            <a:spAutoFit/>
+          </a:bodyPr>
+          <a:lstStyle/>
           <a:p>
             <a:pPr>
-              <a:defRPr b="1" sz="1300">
-                <a:solidFill>
-                  <a:srgbClr val="E2E8F0"/>
+              <a:defRPr b="1" sz="1050">
+                <a:solidFill>
+                  <a:srgbClr val="D97706"/>
                 </a:solidFill>
               </a:defRPr>
             </a:pPr>
             <a:r>
-              <a:t>Prepared by: Prof. Anju Markose | Assistant Professor, Dept. of CSE | VJCET</a:t>
+              <a:t>KTU B.Tech Curriculum</a:t>
             </a:r>
           </a:p>
           <a:p>
             <a:pPr>
-              <a:defRPr sz="1100">
-                <a:solidFill>
-                  <a:srgbClr val="94A3B8"/>
+              <a:defRPr sz="950">
+                <a:solidFill>
+                  <a:srgbClr val="F8FAFC"/>
                 </a:solidFill>
               </a:defRPr>
             </a:pPr>
             <a:r>
-              <a:t>Viswajyothi College of Engineering and Technology (VJCET), Vazhakulam</a:t>
+              <a:t>Official Classroom Slide Deck</a:t>
             </a:r>
           </a:p>
         </p:txBody>
@@ -3395,14 +3534,14 @@
           <a:lstStyle/>
           <a:p>
             <a:pPr>
-              <a:defRPr b="1" sz="2300">
+              <a:defRPr b="1" sz="2200">
                 <a:solidFill>
                   <a:srgbClr val="F8FAFC"/>
                 </a:solidFill>
               </a:defRPr>
             </a:pPr>
             <a:r>
-              <a:t>2.1.3.1 TCP Characteristics &amp; Segment Header Format</a:t>
+              <a:t>2.1.3.1 TCP Header Architecture (RFC 793 / 9293)</a:t>
             </a:r>
           </a:p>
         </p:txBody>
@@ -3450,7 +3589,7 @@
         </p:nvSpPr>
         <p:spPr>
           <a:xfrm>
-            <a:off x="731520" y="1280160"/>
+            <a:off x="731520" y="1234440"/>
             <a:ext cx="6858000" cy="4937760"/>
           </a:xfrm>
           <a:prstGeom prst="rect">
@@ -3468,29 +3607,29 @@
               <a:spcAft>
                 <a:spcPts val="200"/>
               </a:spcAft>
-              <a:defRPr b="1" sz="1500">
+              <a:defRPr b="1" sz="1450">
                 <a:solidFill>
                   <a:srgbClr val="0F1E4A"/>
                 </a:solidFill>
               </a:defRPr>
             </a:pPr>
             <a:r>
-              <a:t>• TCP Characteristics</a:t>
+              <a:t>• Connection-Oriented Byte Stream</a:t>
             </a:r>
           </a:p>
           <a:p>
             <a:pPr>
               <a:spcAft>
-                <a:spcPts val="800"/>
+                <a:spcPts val="700"/>
               </a:spcAft>
-              <a:defRPr sz="1300">
-                <a:solidFill>
-                  <a:srgbClr val="1E293B"/>
+              <a:defRPr sz="1250">
+                <a:solidFill>
+                  <a:srgbClr val="0F172A"/>
                 </a:solidFill>
               </a:defRPr>
             </a:pPr>
             <a:r>
-              <a:t>   Connection-oriented, reliable byte-stream, full-duplex, point-to-point, flow-controlled, congestion-controlled.</a:t>
+              <a:t>   TCP provides full-duplex, reliable, sequenced byte-stream transfer between communicating processes.</a:t>
             </a:r>
           </a:p>
           <a:p>
@@ -3498,29 +3637,29 @@
               <a:spcAft>
                 <a:spcPts val="200"/>
               </a:spcAft>
-              <a:defRPr b="1" sz="1500">
+              <a:defRPr b="1" sz="1450">
                 <a:solidFill>
                   <a:srgbClr val="0F1E4A"/>
                 </a:solidFill>
               </a:defRPr>
             </a:pPr>
             <a:r>
-              <a:t>• Sequence Number (32 bits)</a:t>
+              <a:t>• Header Format (20 to 60 Bytes)</a:t>
             </a:r>
           </a:p>
           <a:p>
             <a:pPr>
               <a:spcAft>
-                <a:spcPts val="800"/>
+                <a:spcPts val="700"/>
               </a:spcAft>
-              <a:defRPr sz="1300">
-                <a:solidFill>
-                  <a:srgbClr val="1E293B"/>
+              <a:defRPr sz="1250">
+                <a:solidFill>
+                  <a:srgbClr val="0F172A"/>
                 </a:solidFill>
               </a:defRPr>
             </a:pPr>
             <a:r>
-              <a:t>   Byte-stream number of the first data byte in this segment (relative to Initial Sequence Number ISN).</a:t>
+              <a:t>   Source Port (16b) | Destination Port (16b) \n Sequence Number (32b: byte-stream offset) \n Acknowledgment Number (32b: next expected byte) \n Data Offset (4b: header length in 32-bit words) | Reserved (4b) | Flags (8b) | Window Size (16b) \n Checksum (16b) | Urgent Pointer (16b) \n Options (0 to 40 bytes: MSS, Window Scale, SACK, Timestamps).</a:t>
             </a:r>
           </a:p>
           <a:p>
@@ -3528,29 +3667,29 @@
               <a:spcAft>
                 <a:spcPts val="200"/>
               </a:spcAft>
-              <a:defRPr b="1" sz="1500">
+              <a:defRPr b="1" sz="1450">
                 <a:solidFill>
                   <a:srgbClr val="0F1E4A"/>
                 </a:solidFill>
               </a:defRPr>
             </a:pPr>
             <a:r>
-              <a:t>• Acknowledgment Number (32 bits)</a:t>
+              <a:t>• TCP Control Flags</a:t>
             </a:r>
           </a:p>
           <a:p>
             <a:pPr>
               <a:spcAft>
-                <a:spcPts val="800"/>
+                <a:spcPts val="700"/>
               </a:spcAft>
-              <a:defRPr sz="1300">
-                <a:solidFill>
-                  <a:srgbClr val="1E293B"/>
+              <a:defRPr sz="1250">
+                <a:solidFill>
+                  <a:srgbClr val="0F172A"/>
                 </a:solidFill>
               </a:defRPr>
             </a:pPr>
             <a:r>
-              <a:t>   Cumulative ACK: The next byte number the sender expects to receive. Acknowledges all prior bytes.</a:t>
+              <a:t>   SYN (Establish connection), ACK (Ack valid), FIN (Close connection), RST (Reset/abort connection), PSH (Push data immediately to app), URG (Urgent pointer active), ECE &amp; CWR (Explicit Congestion Notification).</a:t>
             </a:r>
           </a:p>
           <a:p>
@@ -3558,89 +3697,29 @@
               <a:spcAft>
                 <a:spcPts val="200"/>
               </a:spcAft>
-              <a:defRPr b="1" sz="1500">
+              <a:defRPr b="1" sz="1450">
                 <a:solidFill>
                   <a:srgbClr val="0F1E4A"/>
                 </a:solidFill>
               </a:defRPr>
             </a:pPr>
             <a:r>
-              <a:t>• Header Length / Data Offset (4 bits)</a:t>
+              <a:t>• Cumulative Acknowledgment</a:t>
             </a:r>
           </a:p>
           <a:p>
             <a:pPr>
               <a:spcAft>
-                <a:spcPts val="800"/>
+                <a:spcPts val="700"/>
               </a:spcAft>
-              <a:defRPr sz="1300">
-                <a:solidFill>
-                  <a:srgbClr val="1E293B"/>
+              <a:defRPr sz="1250">
+                <a:solidFill>
+                  <a:srgbClr val="0F172A"/>
                 </a:solidFill>
               </a:defRPr>
             </a:pPr>
             <a:r>
-              <a:t>   Specifies header length in 32-bit (4-byte) words (Range: 5 to 15 words = 20 to 60 bytes).</a:t>
-            </a:r>
-          </a:p>
-          <a:p>
-            <a:pPr>
-              <a:spcAft>
-                <a:spcPts val="200"/>
-              </a:spcAft>
-              <a:defRPr b="1" sz="1500">
-                <a:solidFill>
-                  <a:srgbClr val="0F1E4A"/>
-                </a:solidFill>
-              </a:defRPr>
-            </a:pPr>
-            <a:r>
-              <a:t>• Control Flags (6 bits)</a:t>
-            </a:r>
-          </a:p>
-          <a:p>
-            <a:pPr>
-              <a:spcAft>
-                <a:spcPts val="800"/>
-              </a:spcAft>
-              <a:defRPr sz="1300">
-                <a:solidFill>
-                  <a:srgbClr val="1E293B"/>
-                </a:solidFill>
-              </a:defRPr>
-            </a:pPr>
-            <a:r>
-              <a:t>   URG (Urgent pointer valid), ACK (Ack number valid), PSH (Push data immediately), RST (Reset connection), SYN (Synchronize sequence numbers during handshake), FIN (Terminate connection).</a:t>
-            </a:r>
-          </a:p>
-          <a:p>
-            <a:pPr>
-              <a:spcAft>
-                <a:spcPts val="200"/>
-              </a:spcAft>
-              <a:defRPr b="1" sz="1500">
-                <a:solidFill>
-                  <a:srgbClr val="0F1E4A"/>
-                </a:solidFill>
-              </a:defRPr>
-            </a:pPr>
-            <a:r>
-              <a:t>• Receive Window `rwnd` (16 bits)</a:t>
-            </a:r>
-          </a:p>
-          <a:p>
-            <a:pPr>
-              <a:spcAft>
-                <a:spcPts val="800"/>
-              </a:spcAft>
-              <a:defRPr sz="1300">
-                <a:solidFill>
-                  <a:srgbClr val="1E293B"/>
-                </a:solidFill>
-              </a:defRPr>
-            </a:pPr>
-            <a:r>
-              <a:t>   Number of bytes receiver is willing to accept (Flow Control).</a:t>
+              <a:t>   TCP Ack number $N$ indicates the receiver has successfully received all contiguous bytes up to $N-1$ and is expecting byte $N$.</a:t>
             </a:r>
           </a:p>
         </p:txBody>
@@ -3653,14 +3732,14 @@
         </p:nvSpPr>
         <p:spPr>
           <a:xfrm>
-            <a:off x="7955279" y="1280160"/>
-            <a:ext cx="3566160" cy="4846320"/>
+            <a:off x="7955279" y="1234440"/>
+            <a:ext cx="3566160" cy="4892040"/>
           </a:xfrm>
           <a:prstGeom prst="roundRect">
             <a:avLst/>
           </a:prstGeom>
           <a:solidFill>
-            <a:srgbClr val="F1F5F9"/>
+            <a:srgbClr val="F8FAFC"/>
           </a:solidFill>
           <a:ln w="19050">
             <a:solidFill>
@@ -3698,7 +3777,7 @@
         </p:nvSpPr>
         <p:spPr>
           <a:xfrm>
-            <a:off x="8138160" y="1417320"/>
+            <a:off x="8138160" y="1371600"/>
             <a:ext cx="3200400" cy="4572000"/>
           </a:xfrm>
           <a:prstGeom prst="rect">
@@ -3723,7 +3802,7 @@
               </a:defRPr>
             </a:pPr>
             <a:r>
-              <a:t>Header Breakdown</a:t>
+              <a:t>TCP Control Flags</a:t>
             </a:r>
           </a:p>
           <a:p>
@@ -3733,12 +3812,12 @@
               </a:spcAft>
               <a:defRPr sz="1200">
                 <a:solidFill>
-                  <a:srgbClr val="1E293B"/>
+                  <a:srgbClr val="0F172A"/>
                 </a:solidFill>
               </a:defRPr>
             </a:pPr>
             <a:r>
-              <a:t>→ Base Header: 20 Bytes</a:t>
+              <a:t>→ SYN: Connection request</a:t>
             </a:r>
           </a:p>
           <a:p>
@@ -3748,12 +3827,12 @@
               </a:spcAft>
               <a:defRPr sz="1200">
                 <a:solidFill>
-                  <a:srgbClr val="1E293B"/>
+                  <a:srgbClr val="0F172A"/>
                 </a:solidFill>
               </a:defRPr>
             </a:pPr>
             <a:r>
-              <a:t>→ Max Options: 40 Bytes</a:t>
+              <a:t>→ ACK: Acknowledgment field</a:t>
             </a:r>
           </a:p>
           <a:p>
@@ -3763,12 +3842,12 @@
               </a:spcAft>
               <a:defRPr sz="1200">
                 <a:solidFill>
-                  <a:srgbClr val="1E293B"/>
+                  <a:srgbClr val="0F172A"/>
                 </a:solidFill>
               </a:defRPr>
             </a:pPr>
             <a:r>
-              <a:t>→ Total Header: 20 to 60 Bytes</a:t>
+              <a:t>→ FIN: Graceful teardown</a:t>
             </a:r>
           </a:p>
           <a:p>
@@ -3778,12 +3857,12 @@
               </a:spcAft>
               <a:defRPr sz="1200">
                 <a:solidFill>
-                  <a:srgbClr val="1E293B"/>
+                  <a:srgbClr val="0F172A"/>
                 </a:solidFill>
               </a:defRPr>
             </a:pPr>
             <a:r>
-              <a:t>→ Seq No: Byte-level tracking</a:t>
+              <a:t>→ RST: Reset connection</a:t>
             </a:r>
           </a:p>
           <a:p>
@@ -3793,12 +3872,27 @@
               </a:spcAft>
               <a:defRPr sz="1200">
                 <a:solidFill>
-                  <a:srgbClr val="1E293B"/>
+                  <a:srgbClr val="0F172A"/>
                 </a:solidFill>
               </a:defRPr>
             </a:pPr>
             <a:r>
-              <a:t>→ Ack No: Cumulative next-expected</a:t>
+              <a:t>→ PSH: Push buffer to app</a:t>
+            </a:r>
+          </a:p>
+          <a:p>
+            <a:pPr>
+              <a:spcAft>
+                <a:spcPts val="600"/>
+              </a:spcAft>
+              <a:defRPr sz="1200">
+                <a:solidFill>
+                  <a:srgbClr val="0F172A"/>
+                </a:solidFill>
+              </a:defRPr>
+            </a:pPr>
+            <a:r>
+              <a:t>→ URG: Out-of-band data</a:t>
             </a:r>
           </a:p>
         </p:txBody>
@@ -3811,8 +3905,8 @@
         </p:nvSpPr>
         <p:spPr>
           <a:xfrm>
-            <a:off x="731520" y="6309360"/>
-            <a:ext cx="10789920" cy="365760"/>
+            <a:off x="731520" y="6327648"/>
+            <a:ext cx="10789920" cy="320040"/>
           </a:xfrm>
           <a:prstGeom prst="rect">
             <a:avLst/>
@@ -3834,6 +3928,41 @@
             </a:pPr>
             <a:r>
               <a:t>PCCST501 Computer Networks | KTU 2024 Scheme | Prof. Anju Markose | Assistant Professor, Dept. of CSE | VJCET</a:t>
+            </a:r>
+          </a:p>
+        </p:txBody>
+      </p:sp>
+      <p:sp>
+        <p:nvSpPr>
+          <p:cNvPr id="10" name="TextBox 9"/>
+          <p:cNvSpPr txBox="1"/>
+          <p:nvPr/>
+        </p:nvSpPr>
+        <p:spPr>
+          <a:xfrm>
+            <a:off x="6858000" y="6327648"/>
+            <a:ext cx="4572000" cy="320040"/>
+          </a:xfrm>
+          <a:prstGeom prst="rect">
+            <a:avLst/>
+          </a:prstGeom>
+          <a:noFill/>
+        </p:spPr>
+        <p:txBody>
+          <a:bodyPr wrap="none">
+            <a:spAutoFit/>
+          </a:bodyPr>
+          <a:lstStyle/>
+          <a:p>
+            <a:pPr algn="r">
+              <a:defRPr sz="950">
+                <a:solidFill>
+                  <a:srgbClr val="64748B"/>
+                </a:solidFill>
+              </a:defRPr>
+            </a:pPr>
+            <a:r>
+              <a:t>Dept. of CSE, VJCET</a:t>
             </a:r>
           </a:p>
         </p:txBody>
@@ -3965,14 +4094,14 @@
           <a:lstStyle/>
           <a:p>
             <a:pPr>
-              <a:defRPr b="1" sz="2300">
+              <a:defRPr b="1" sz="2200">
                 <a:solidFill>
                   <a:srgbClr val="F8FAFC"/>
                 </a:solidFill>
               </a:defRPr>
             </a:pPr>
             <a:r>
-              <a:t>2.1.3.2 Connection Lifecycle: 3-Way Handshake &amp; 4-Way Teardown</a:t>
+              <a:t>2.1.3.2 Connection Lifecycle: 3-Way Handshake vs 4-Way Teardown</a:t>
             </a:r>
           </a:p>
         </p:txBody>
@@ -4007,7 +4136,7 @@
               </a:defRPr>
             </a:pPr>
             <a:r>
-              <a:t>M2.1.3 HANDSHAKES</a:t>
+              <a:t>M2.1.3 TCP LIFECYCLE</a:t>
             </a:r>
           </a:p>
         </p:txBody>
@@ -4020,18 +4149,18 @@
         </p:nvSpPr>
         <p:spPr>
           <a:xfrm>
-            <a:off x="731520" y="1280160"/>
-            <a:ext cx="5212080" cy="4846320"/>
+            <a:off x="731520" y="1234440"/>
+            <a:ext cx="5212080" cy="4892040"/>
           </a:xfrm>
           <a:prstGeom prst="roundRect">
             <a:avLst/>
           </a:prstGeom>
           <a:solidFill>
-            <a:srgbClr val="F1F5F9"/>
+            <a:srgbClr val="F8FAFC"/>
           </a:solidFill>
           <a:ln w="19050">
             <a:solidFill>
-              <a:srgbClr val="0E7490"/>
+              <a:srgbClr val="0F1E4A"/>
             </a:solidFill>
           </a:ln>
         </p:spPr>
@@ -4065,7 +4194,7 @@
         </p:nvSpPr>
         <p:spPr>
           <a:xfrm>
-            <a:off x="914400" y="1417320"/>
+            <a:off x="914400" y="1371600"/>
             <a:ext cx="4846320" cy="4572000"/>
           </a:xfrm>
           <a:prstGeom prst="rect">
@@ -4081,76 +4210,76 @@
           <a:p>
             <a:pPr>
               <a:spcAft>
-                <a:spcPts val="1200"/>
+                <a:spcPts val="1000"/>
               </a:spcAft>
-              <a:defRPr b="1" sz="1600">
+              <a:defRPr b="1" sz="1550">
                 <a:solidFill>
                   <a:srgbClr val="0F1E4A"/>
                 </a:solidFill>
               </a:defRPr>
             </a:pPr>
             <a:r>
-              <a:t>3-Way Handshake (Establishment)</a:t>
+              <a:t>3-Way Handshake (Connection Setup)</a:t>
             </a:r>
           </a:p>
           <a:p>
             <a:pPr>
               <a:spcAft>
-                <a:spcPts val="600"/>
+                <a:spcPts val="500"/>
               </a:spcAft>
-              <a:defRPr sz="1250">
-                <a:solidFill>
-                  <a:srgbClr val="1E293B"/>
+              <a:defRPr sz="1200">
+                <a:solidFill>
+                  <a:srgbClr val="0F172A"/>
                 </a:solidFill>
               </a:defRPr>
             </a:pPr>
             <a:r>
-              <a:t>• Step 1 (Client -&gt; Server): SYN=1, ACK=0, Seq = client_isn (Requests connection)</a:t>
+              <a:t>• Step 1 (Client -&gt; Server): Client sends `SYN = 1`, `Seq = x` (Initial Sequence Number $ISN_c$). Enters `SYN_SENT` state</a:t>
             </a:r>
           </a:p>
           <a:p>
             <a:pPr>
               <a:spcAft>
-                <a:spcPts val="600"/>
+                <a:spcPts val="500"/>
               </a:spcAft>
-              <a:defRPr sz="1250">
-                <a:solidFill>
-                  <a:srgbClr val="1E293B"/>
+              <a:defRPr sz="1200">
+                <a:solidFill>
+                  <a:srgbClr val="0F172A"/>
                 </a:solidFill>
               </a:defRPr>
             </a:pPr>
             <a:r>
-              <a:t>• Step 2 (Server -&gt; Client): SYN=1, ACK=1, Seq = server_isn, Ack = client_isn + 1</a:t>
+              <a:t>• Step 2 (Server -&gt; Client): Server allocates buffers, replies `SYN = 1`, `ACK = 1`, `Seq = y` ($ISN_s$), `Ack = x + 1`. Enters `SYN_RCVD`</a:t>
             </a:r>
           </a:p>
           <a:p>
             <a:pPr>
               <a:spcAft>
-                <a:spcPts val="600"/>
+                <a:spcPts val="500"/>
               </a:spcAft>
-              <a:defRPr sz="1250">
-                <a:solidFill>
-                  <a:srgbClr val="1E293B"/>
+              <a:defRPr sz="1200">
+                <a:solidFill>
+                  <a:srgbClr val="0F172A"/>
                 </a:solidFill>
               </a:defRPr>
             </a:pPr>
             <a:r>
-              <a:t>• Step 3 (Client -&gt; Server): SYN=0, ACK=1, Seq = client_isn + 1, Ack = server_isn + 1 (May piggyback payload)</a:t>
+              <a:t>• Step 3 (Client -&gt; Server): Client sends `ACK = 1`, `Seq = x + 1`, `Ack = y + 1` (may piggyback initial application data). Enters `ESTABLISHED`</a:t>
             </a:r>
           </a:p>
           <a:p>
             <a:pPr>
               <a:spcAft>
-                <a:spcPts val="600"/>
+                <a:spcPts val="500"/>
               </a:spcAft>
-              <a:defRPr sz="1250">
-                <a:solidFill>
-                  <a:srgbClr val="1E293B"/>
+              <a:defRPr sz="1200">
+                <a:solidFill>
+                  <a:srgbClr val="0F172A"/>
                 </a:solidFill>
               </a:defRPr>
             </a:pPr>
             <a:r>
-              <a:t>• SYN Flood Defense: SYN Cookies avoid pre-allocating TCB state before ACK</a:t>
+              <a:t>• SYN Flood Defense: TCP SYN Cookies prevent server memory exhaustion from bogus SYN requests</a:t>
             </a:r>
           </a:p>
         </p:txBody>
@@ -4163,8 +4292,8 @@
         </p:nvSpPr>
         <p:spPr>
           <a:xfrm>
-            <a:off x="6309360" y="1280160"/>
-            <a:ext cx="5212080" cy="4846320"/>
+            <a:off x="6309360" y="1234440"/>
+            <a:ext cx="5212080" cy="4892040"/>
           </a:xfrm>
           <a:prstGeom prst="roundRect">
             <a:avLst/>
@@ -4174,7 +4303,7 @@
           </a:solidFill>
           <a:ln w="19050">
             <a:solidFill>
-              <a:srgbClr val="0F1E4A"/>
+              <a:srgbClr val="0E7490"/>
             </a:solidFill>
           </a:ln>
         </p:spPr>
@@ -4208,7 +4337,7 @@
         </p:nvSpPr>
         <p:spPr>
           <a:xfrm>
-            <a:off x="6492240" y="1417320"/>
+            <a:off x="6492240" y="1371600"/>
             <a:ext cx="4846320" cy="4572000"/>
           </a:xfrm>
           <a:prstGeom prst="rect">
@@ -4224,16 +4353,531 @@
           <a:p>
             <a:pPr>
               <a:spcAft>
-                <a:spcPts val="1200"/>
+                <a:spcPts val="1000"/>
               </a:spcAft>
-              <a:defRPr b="1" sz="1600">
+              <a:defRPr b="1" sz="1550">
                 <a:solidFill>
                   <a:srgbClr val="0E7490"/>
                 </a:solidFill>
               </a:defRPr>
             </a:pPr>
             <a:r>
-              <a:t>4-Way Handshake (Termination)</a:t>
+              <a:t>4-Way Connection Teardown (Graceful Close)</a:t>
+            </a:r>
+          </a:p>
+          <a:p>
+            <a:pPr>
+              <a:spcAft>
+                <a:spcPts val="500"/>
+              </a:spcAft>
+              <a:defRPr sz="1200">
+                <a:solidFill>
+                  <a:srgbClr val="0F172A"/>
+                </a:solidFill>
+              </a:defRPr>
+            </a:pPr>
+            <a:r>
+              <a:t>• Step 1 (Client -&gt; Server): Client finishes sending, transmits `FIN = 1`, `Seq = u`. Enters `FIN_WAIT_1`</a:t>
+            </a:r>
+          </a:p>
+          <a:p>
+            <a:pPr>
+              <a:spcAft>
+                <a:spcPts val="500"/>
+              </a:spcAft>
+              <a:defRPr sz="1200">
+                <a:solidFill>
+                  <a:srgbClr val="0F172A"/>
+                </a:solidFill>
+              </a:defRPr>
+            </a:pPr>
+            <a:r>
+              <a:t>• Step 2 (Server -&gt; Client): Server acknowledges with `ACK = 1`, `Ack = u + 1`. Enters `CLOSE_WAIT`; Client enters `FIN_WAIT_2`</a:t>
+            </a:r>
+          </a:p>
+          <a:p>
+            <a:pPr>
+              <a:spcAft>
+                <a:spcPts val="500"/>
+              </a:spcAft>
+              <a:defRPr sz="1200">
+                <a:solidFill>
+                  <a:srgbClr val="0F172A"/>
+                </a:solidFill>
+              </a:defRPr>
+            </a:pPr>
+            <a:r>
+              <a:t>• Step 3 (Server -&gt; Client): Server finishes outstanding data, transmits `FIN = 1`, `Seq = v`. Enters `LAST_ACK`</a:t>
+            </a:r>
+          </a:p>
+          <a:p>
+            <a:pPr>
+              <a:spcAft>
+                <a:spcPts val="500"/>
+              </a:spcAft>
+              <a:defRPr sz="1200">
+                <a:solidFill>
+                  <a:srgbClr val="0F172A"/>
+                </a:solidFill>
+              </a:defRPr>
+            </a:pPr>
+            <a:r>
+              <a:t>• Step 4 (Client -&gt; Server): Client replies `ACK = 1`, `Ack = v + 1`. Client enters `TIME_WAIT` for 2MSL (Maximum Segment Lifetime = 60-120s) before terminating to ensure final ACK delivery</a:t>
+            </a:r>
+          </a:p>
+        </p:txBody>
+      </p:sp>
+      <p:sp>
+        <p:nvSpPr>
+          <p:cNvPr id="10" name="TextBox 9"/>
+          <p:cNvSpPr txBox="1"/>
+          <p:nvPr/>
+        </p:nvSpPr>
+        <p:spPr>
+          <a:xfrm>
+            <a:off x="731520" y="6327648"/>
+            <a:ext cx="10789920" cy="320040"/>
+          </a:xfrm>
+          <a:prstGeom prst="rect">
+            <a:avLst/>
+          </a:prstGeom>
+          <a:noFill/>
+        </p:spPr>
+        <p:txBody>
+          <a:bodyPr wrap="none">
+            <a:spAutoFit/>
+          </a:bodyPr>
+          <a:lstStyle/>
+          <a:p>
+            <a:pPr>
+              <a:defRPr sz="950">
+                <a:solidFill>
+                  <a:srgbClr val="64748B"/>
+                </a:solidFill>
+              </a:defRPr>
+            </a:pPr>
+            <a:r>
+              <a:t>PCCST501 Computer Networks | KTU 2024 Scheme | Prof. Anju Markose | Assistant Professor, Dept. of CSE | VJCET</a:t>
+            </a:r>
+          </a:p>
+        </p:txBody>
+      </p:sp>
+      <p:sp>
+        <p:nvSpPr>
+          <p:cNvPr id="11" name="TextBox 10"/>
+          <p:cNvSpPr txBox="1"/>
+          <p:nvPr/>
+        </p:nvSpPr>
+        <p:spPr>
+          <a:xfrm>
+            <a:off x="6858000" y="6327648"/>
+            <a:ext cx="4572000" cy="320040"/>
+          </a:xfrm>
+          <a:prstGeom prst="rect">
+            <a:avLst/>
+          </a:prstGeom>
+          <a:noFill/>
+        </p:spPr>
+        <p:txBody>
+          <a:bodyPr wrap="none">
+            <a:spAutoFit/>
+          </a:bodyPr>
+          <a:lstStyle/>
+          <a:p>
+            <a:pPr algn="r">
+              <a:defRPr sz="950">
+                <a:solidFill>
+                  <a:srgbClr val="64748B"/>
+                </a:solidFill>
+              </a:defRPr>
+            </a:pPr>
+            <a:r>
+              <a:t>Dept. of CSE, VJCET</a:t>
+            </a:r>
+          </a:p>
+        </p:txBody>
+      </p:sp>
+    </p:spTree>
+  </p:cSld>
+  <p:clrMapOvr>
+    <a:masterClrMapping/>
+  </p:clrMapOvr>
+</p:sld>
+</file>
+
+<file path=ppt/slides/slide4.xml><?xml version="1.0" encoding="utf-8"?>
+<p:sld xmlns:a="http://schemas.openxmlformats.org/drawingml/2006/main" xmlns:p="http://schemas.openxmlformats.org/presentationml/2006/main" xmlns:r="http://schemas.openxmlformats.org/officeDocument/2006/relationships">
+  <p:cSld>
+    <p:spTree>
+      <p:nvGrpSpPr>
+        <p:cNvPr id="1" name=""/>
+        <p:cNvGrpSpPr/>
+        <p:nvPr/>
+      </p:nvGrpSpPr>
+      <p:grpSpPr/>
+      <p:sp>
+        <p:nvSpPr>
+          <p:cNvPr id="2" name="Rectangle 1"/>
+          <p:cNvSpPr/>
+          <p:nvPr/>
+        </p:nvSpPr>
+        <p:spPr>
+          <a:xfrm>
+            <a:off x="0" y="0"/>
+            <a:ext cx="12191695" cy="1005840"/>
+          </a:xfrm>
+          <a:prstGeom prst="rect">
+            <a:avLst/>
+          </a:prstGeom>
+          <a:solidFill>
+            <a:srgbClr val="0F1E4A"/>
+          </a:solidFill>
+          <a:ln>
+            <a:noFill/>
+          </a:ln>
+        </p:spPr>
+        <p:style>
+          <a:lnRef idx="1">
+            <a:schemeClr val="accent1"/>
+          </a:lnRef>
+          <a:fillRef idx="3">
+            <a:schemeClr val="accent1"/>
+          </a:fillRef>
+          <a:effectRef idx="2">
+            <a:schemeClr val="accent1"/>
+          </a:effectRef>
+          <a:fontRef idx="minor">
+            <a:schemeClr val="lt1"/>
+          </a:fontRef>
+        </p:style>
+        <p:txBody>
+          <a:bodyPr rtlCol="0" anchor="ctr"/>
+          <a:lstStyle/>
+          <a:p>
+            <a:pPr algn="ctr"/>
+          </a:p>
+        </p:txBody>
+      </p:sp>
+      <p:sp>
+        <p:nvSpPr>
+          <p:cNvPr id="3" name="Rectangle 2"/>
+          <p:cNvSpPr/>
+          <p:nvPr/>
+        </p:nvSpPr>
+        <p:spPr>
+          <a:xfrm>
+            <a:off x="0" y="969264"/>
+            <a:ext cx="12191695" cy="36576"/>
+          </a:xfrm>
+          <a:prstGeom prst="rect">
+            <a:avLst/>
+          </a:prstGeom>
+          <a:solidFill>
+            <a:srgbClr val="D97706"/>
+          </a:solidFill>
+          <a:ln>
+            <a:noFill/>
+          </a:ln>
+        </p:spPr>
+        <p:style>
+          <a:lnRef idx="1">
+            <a:schemeClr val="accent1"/>
+          </a:lnRef>
+          <a:fillRef idx="3">
+            <a:schemeClr val="accent1"/>
+          </a:fillRef>
+          <a:effectRef idx="2">
+            <a:schemeClr val="accent1"/>
+          </a:effectRef>
+          <a:fontRef idx="minor">
+            <a:schemeClr val="lt1"/>
+          </a:fontRef>
+        </p:style>
+        <p:txBody>
+          <a:bodyPr rtlCol="0" anchor="ctr"/>
+          <a:lstStyle/>
+          <a:p>
+            <a:pPr algn="ctr"/>
+          </a:p>
+        </p:txBody>
+      </p:sp>
+      <p:sp>
+        <p:nvSpPr>
+          <p:cNvPr id="4" name="TextBox 3"/>
+          <p:cNvSpPr txBox="1"/>
+          <p:nvPr/>
+        </p:nvSpPr>
+        <p:spPr>
+          <a:xfrm>
+            <a:off x="731520" y="164592"/>
+            <a:ext cx="8412480" cy="685800"/>
+          </a:xfrm>
+          <a:prstGeom prst="rect">
+            <a:avLst/>
+          </a:prstGeom>
+          <a:noFill/>
+        </p:spPr>
+        <p:txBody>
+          <a:bodyPr wrap="none">
+            <a:spAutoFit/>
+          </a:bodyPr>
+          <a:lstStyle/>
+          <a:p>
+            <a:pPr>
+              <a:defRPr b="1" sz="2100">
+                <a:solidFill>
+                  <a:srgbClr val="F8FAFC"/>
+                </a:solidFill>
+              </a:defRPr>
+            </a:pPr>
+            <a:r>
+              <a:t>🎯 Exam Booster &amp; Review: TCP Connection Management</a:t>
+            </a:r>
+          </a:p>
+        </p:txBody>
+      </p:sp>
+      <p:sp>
+        <p:nvSpPr>
+          <p:cNvPr id="5" name="TextBox 4"/>
+          <p:cNvSpPr txBox="1"/>
+          <p:nvPr/>
+        </p:nvSpPr>
+        <p:spPr>
+          <a:xfrm>
+            <a:off x="8229600" y="164592"/>
+            <a:ext cx="3291840" cy="685800"/>
+          </a:xfrm>
+          <a:prstGeom prst="rect">
+            <a:avLst/>
+          </a:prstGeom>
+          <a:noFill/>
+        </p:spPr>
+        <p:txBody>
+          <a:bodyPr wrap="none">
+            <a:spAutoFit/>
+          </a:bodyPr>
+          <a:lstStyle/>
+          <a:p>
+            <a:pPr algn="r">
+              <a:defRPr b="1" sz="1300">
+                <a:solidFill>
+                  <a:srgbClr val="D97706"/>
+                </a:solidFill>
+              </a:defRPr>
+            </a:pPr>
+            <a:r>
+              <a:t>M2.1.3</a:t>
+            </a:r>
+          </a:p>
+        </p:txBody>
+      </p:sp>
+      <p:sp>
+        <p:nvSpPr>
+          <p:cNvPr id="6" name="Rounded Rectangle 5"/>
+          <p:cNvSpPr/>
+          <p:nvPr/>
+        </p:nvSpPr>
+        <p:spPr>
+          <a:xfrm>
+            <a:off x="731520" y="1234440"/>
+            <a:ext cx="5303520" cy="4892040"/>
+          </a:xfrm>
+          <a:prstGeom prst="roundRect">
+            <a:avLst/>
+          </a:prstGeom>
+          <a:solidFill>
+            <a:srgbClr val="FEF3C7"/>
+          </a:solidFill>
+          <a:ln w="19050">
+            <a:solidFill>
+              <a:srgbClr val="D97706"/>
+            </a:solidFill>
+          </a:ln>
+        </p:spPr>
+        <p:style>
+          <a:lnRef idx="1">
+            <a:schemeClr val="accent1"/>
+          </a:lnRef>
+          <a:fillRef idx="3">
+            <a:schemeClr val="accent1"/>
+          </a:fillRef>
+          <a:effectRef idx="2">
+            <a:schemeClr val="accent1"/>
+          </a:effectRef>
+          <a:fontRef idx="minor">
+            <a:schemeClr val="lt1"/>
+          </a:fontRef>
+        </p:style>
+        <p:txBody>
+          <a:bodyPr rtlCol="0" anchor="ctr"/>
+          <a:lstStyle/>
+          <a:p>
+            <a:pPr algn="ctr"/>
+          </a:p>
+        </p:txBody>
+      </p:sp>
+      <p:sp>
+        <p:nvSpPr>
+          <p:cNvPr id="7" name="TextBox 6"/>
+          <p:cNvSpPr txBox="1"/>
+          <p:nvPr/>
+        </p:nvSpPr>
+        <p:spPr>
+          <a:xfrm>
+            <a:off x="914400" y="1371600"/>
+            <a:ext cx="4937760" cy="4572000"/>
+          </a:xfrm>
+          <a:prstGeom prst="rect">
+            <a:avLst/>
+          </a:prstGeom>
+          <a:noFill/>
+        </p:spPr>
+        <p:txBody>
+          <a:bodyPr wrap="square">
+            <a:spAutoFit/>
+          </a:bodyPr>
+          <a:lstStyle/>
+          <a:p>
+            <a:pPr>
+              <a:spcAft>
+                <a:spcPts val="1000"/>
+              </a:spcAft>
+              <a:defRPr b="1" sz="1450">
+                <a:solidFill>
+                  <a:srgbClr val="D97706"/>
+                </a:solidFill>
+              </a:defRPr>
+            </a:pPr>
+            <a:r>
+              <a:t>📚 KTU High-Yield Questions (K3 Apply)</a:t>
+            </a:r>
+          </a:p>
+          <a:p>
+            <a:pPr>
+              <a:spcAft>
+                <a:spcPts val="700"/>
+              </a:spcAft>
+              <a:defRPr sz="1200">
+                <a:solidFill>
+                  <a:srgbClr val="0F172A"/>
+                </a:solidFill>
+              </a:defRPr>
+            </a:pPr>
+            <a:r>
+              <a:t>Q: Draw the complete TCP segment header format and explain all fields, especially Sequence Number, ACK Number, and Control Flags. (8 Marks)</a:t>
+            </a:r>
+          </a:p>
+          <a:p>
+            <a:pPr>
+              <a:spcAft>
+                <a:spcPts val="700"/>
+              </a:spcAft>
+              <a:defRPr sz="1200">
+                <a:solidFill>
+                  <a:srgbClr val="0F172A"/>
+                </a:solidFill>
+              </a:defRPr>
+            </a:pPr>
+            <a:r>
+              <a:t>Q: Illustrate the TCP 3-Way Handshake with sequence and acknowledgment numbers. Why is a 2-way handshake insufficient? (8 Marks)</a:t>
+            </a:r>
+          </a:p>
+          <a:p>
+            <a:pPr>
+              <a:spcAft>
+                <a:spcPts val="700"/>
+              </a:spcAft>
+              <a:defRPr sz="1200">
+                <a:solidFill>
+                  <a:srgbClr val="0F172A"/>
+                </a:solidFill>
+              </a:defRPr>
+            </a:pPr>
+            <a:r>
+              <a:t>Q: Explain the purpose of the `TIME_WAIT` state and the 2MSL timer during TCP connection termination. (5 Marks)</a:t>
+            </a:r>
+          </a:p>
+        </p:txBody>
+      </p:sp>
+      <p:sp>
+        <p:nvSpPr>
+          <p:cNvPr id="8" name="Rounded Rectangle 7"/>
+          <p:cNvSpPr/>
+          <p:nvPr/>
+        </p:nvSpPr>
+        <p:spPr>
+          <a:xfrm>
+            <a:off x="6309360" y="1234440"/>
+            <a:ext cx="5212080" cy="4892040"/>
+          </a:xfrm>
+          <a:prstGeom prst="roundRect">
+            <a:avLst/>
+          </a:prstGeom>
+          <a:solidFill>
+            <a:srgbClr val="EEF2FF"/>
+          </a:solidFill>
+          <a:ln w="19050">
+            <a:solidFill>
+              <a:srgbClr val="0E7490"/>
+            </a:solidFill>
+          </a:ln>
+        </p:spPr>
+        <p:style>
+          <a:lnRef idx="1">
+            <a:schemeClr val="accent1"/>
+          </a:lnRef>
+          <a:fillRef idx="3">
+            <a:schemeClr val="accent1"/>
+          </a:fillRef>
+          <a:effectRef idx="2">
+            <a:schemeClr val="accent1"/>
+          </a:effectRef>
+          <a:fontRef idx="minor">
+            <a:schemeClr val="lt1"/>
+          </a:fontRef>
+        </p:style>
+        <p:txBody>
+          <a:bodyPr rtlCol="0" anchor="ctr"/>
+          <a:lstStyle/>
+          <a:p>
+            <a:pPr algn="ctr"/>
+          </a:p>
+        </p:txBody>
+      </p:sp>
+      <p:sp>
+        <p:nvSpPr>
+          <p:cNvPr id="9" name="TextBox 8"/>
+          <p:cNvSpPr txBox="1"/>
+          <p:nvPr/>
+        </p:nvSpPr>
+        <p:spPr>
+          <a:xfrm>
+            <a:off x="6492240" y="1371600"/>
+            <a:ext cx="4846320" cy="4572000"/>
+          </a:xfrm>
+          <a:prstGeom prst="rect">
+            <a:avLst/>
+          </a:prstGeom>
+          <a:noFill/>
+        </p:spPr>
+        <p:txBody>
+          <a:bodyPr wrap="square">
+            <a:spAutoFit/>
+          </a:bodyPr>
+          <a:lstStyle/>
+          <a:p>
+            <a:pPr>
+              <a:spcAft>
+                <a:spcPts val="1000"/>
+              </a:spcAft>
+              <a:defRPr b="1" sz="1450">
+                <a:solidFill>
+                  <a:srgbClr val="0E7490"/>
+                </a:solidFill>
+              </a:defRPr>
+            </a:pPr>
+            <a:r>
+              <a:t>💡 Critical Conceptual Takeaways</a:t>
             </a:r>
           </a:p>
           <a:p>
@@ -4241,14 +4885,14 @@
               <a:spcAft>
                 <a:spcPts val="600"/>
               </a:spcAft>
-              <a:defRPr sz="1250">
-                <a:solidFill>
-                  <a:srgbClr val="1E293B"/>
+              <a:defRPr sz="1200">
+                <a:solidFill>
+                  <a:srgbClr val="0F172A"/>
                 </a:solidFill>
               </a:defRPr>
             </a:pPr>
             <a:r>
-              <a:t>• Step 1 (Client -&gt; Server): FIN=1, Seq = u (Client enters FIN_WAIT_1)</a:t>
+              <a:t>✔ TCP Sequence number tracks the byte offset of transmitted data; ACK number represents the next expected byte.</a:t>
             </a:r>
           </a:p>
           <a:p>
@@ -4256,14 +4900,14 @@
               <a:spcAft>
                 <a:spcPts val="600"/>
               </a:spcAft>
-              <a:defRPr sz="1250">
-                <a:solidFill>
-                  <a:srgbClr val="1E293B"/>
+              <a:defRPr sz="1200">
+                <a:solidFill>
+                  <a:srgbClr val="0F172A"/>
                 </a:solidFill>
               </a:defRPr>
             </a:pPr>
             <a:r>
-              <a:t>• Step 2 (Server -&gt; Client): ACK=1, Ack = u + 1 (Server enters CLOSE_WAIT; Client enters FIN_WAIT_2)</a:t>
+              <a:t>✔ 3-way handshake is mandatory to synchronize Initial Sequence Numbers (ISNs) bi-directionally and verify full-duplex connectivity.</a:t>
             </a:r>
           </a:p>
           <a:p>
@@ -4271,29 +4915,14 @@
               <a:spcAft>
                 <a:spcPts val="600"/>
               </a:spcAft>
-              <a:defRPr sz="1250">
-                <a:solidFill>
-                  <a:srgbClr val="1E293B"/>
+              <a:defRPr sz="1200">
+                <a:solidFill>
+                  <a:srgbClr val="0F172A"/>
                 </a:solidFill>
               </a:defRPr>
             </a:pPr>
             <a:r>
-              <a:t>• Step 3 (Server -&gt; Client): FIN=1, Seq = w (Server enters LAST_ACK)</a:t>
-            </a:r>
-          </a:p>
-          <a:p>
-            <a:pPr>
-              <a:spcAft>
-                <a:spcPts val="600"/>
-              </a:spcAft>
-              <a:defRPr sz="1250">
-                <a:solidFill>
-                  <a:srgbClr val="1E293B"/>
-                </a:solidFill>
-              </a:defRPr>
-            </a:pPr>
-            <a:r>
-              <a:t>• Step 4 (Client -&gt; Server): ACK=1, Ack = w + 1 (Client enters TIME_WAIT for 2MSL = 2 minutes)</a:t>
+              <a:t>✔ `TIME_WAIT` (2MSL) guarantees that any lingering duplicate packets in the network expire before the socket is reused.</a:t>
             </a:r>
           </a:p>
         </p:txBody>
@@ -4306,8 +4935,8 @@
         </p:nvSpPr>
         <p:spPr>
           <a:xfrm>
-            <a:off x="731520" y="6309360"/>
-            <a:ext cx="10789920" cy="365760"/>
+            <a:off x="731520" y="6327648"/>
+            <a:ext cx="10789920" cy="320040"/>
           </a:xfrm>
           <a:prstGeom prst="rect">
             <a:avLst/>
@@ -4329,6 +4958,41 @@
             </a:pPr>
             <a:r>
               <a:t>PCCST501 Computer Networks | KTU 2024 Scheme | Prof. Anju Markose | Assistant Professor, Dept. of CSE | VJCET</a:t>
+            </a:r>
+          </a:p>
+        </p:txBody>
+      </p:sp>
+      <p:sp>
+        <p:nvSpPr>
+          <p:cNvPr id="11" name="TextBox 10"/>
+          <p:cNvSpPr txBox="1"/>
+          <p:nvPr/>
+        </p:nvSpPr>
+        <p:spPr>
+          <a:xfrm>
+            <a:off x="6858000" y="6327648"/>
+            <a:ext cx="4572000" cy="320040"/>
+          </a:xfrm>
+          <a:prstGeom prst="rect">
+            <a:avLst/>
+          </a:prstGeom>
+          <a:noFill/>
+        </p:spPr>
+        <p:txBody>
+          <a:bodyPr wrap="none">
+            <a:spAutoFit/>
+          </a:bodyPr>
+          <a:lstStyle/>
+          <a:p>
+            <a:pPr algn="r">
+              <a:defRPr sz="950">
+                <a:solidFill>
+                  <a:srgbClr val="64748B"/>
+                </a:solidFill>
+              </a:defRPr>
+            </a:pPr>
+            <a:r>
+              <a:t>Dept. of CSE, VJCET</a:t>
             </a:r>
           </a:p>
         </p:txBody>
